--- a/public/fun/cards/creative/명함_디자인영상사진_12_피오니.pptx
+++ b/public/fun/cards/creative/명함_디자인영상사진_12_피오니.pptx
@@ -3803,7 +3803,7 @@
         <p:spPr>
           <a:xfrm>
             <a:off x="252000" y="388800"/>
-            <a:ext cx="576000" cy="324000"/>
+            <a:ext cx="576000" cy="129600"/>
           </a:xfrm>
           <a:prstGeom prst="rect">
             <a:avLst/>
@@ -3818,11 +3818,11 @@
           <a:p>
             <a:pPr algn="l">
               <a:lnSpc>
-                <a:spcPts val="2610"/>
+                <a:spcPts val="927"/>
               </a:lnSpc>
             </a:pPr>
             <a:r>
-              <a:rPr sz="1800" b="1">
+              <a:rPr sz="640" b="1" spc="120">
                 <a:solidFill>
                   <a:srgbClr val="516667"/>
                 </a:solidFill>
@@ -3836,13 +3836,42 @@
       </p:sp>
       <p:sp>
         <p:nvSpPr>
-          <p:cNvPr id="4" name="텍스트"/>
+          <p:cNvPr id="4" name="Rectangle 3"/>
+          <p:cNvSpPr/>
+          <p:nvPr/>
+        </p:nvSpPr>
+        <p:spPr>
+          <a:xfrm>
+            <a:off x="252000" y="554400"/>
+            <a:ext cx="144000" cy="14400"/>
+          </a:xfrm>
+          <a:prstGeom prst="rect">
+            <a:avLst/>
+          </a:prstGeom>
+          <a:solidFill>
+            <a:srgbClr val="516667"/>
+          </a:solidFill>
+          <a:ln>
+            <a:noFill/>
+          </a:ln>
+        </p:spPr>
+        <p:txBody>
+          <a:bodyPr rtlCol="0" anchor="ctr"/>
+          <a:lstStyle/>
+          <a:p>
+            <a:pPr algn="ctr"/>
+          </a:p>
+        </p:txBody>
+      </p:sp>
+      <p:sp>
+        <p:nvSpPr>
+          <p:cNvPr id="5" name="텍스트"/>
           <p:cNvSpPr txBox="1"/>
           <p:nvPr/>
         </p:nvSpPr>
         <p:spPr>
           <a:xfrm>
-            <a:off x="252000" y="712800"/>
+            <a:off x="252000" y="626400"/>
             <a:ext cx="1296000" cy="180000"/>
           </a:xfrm>
           <a:prstGeom prst="rect">
@@ -3858,11 +3887,11 @@
           <a:p>
             <a:pPr algn="l">
               <a:lnSpc>
-                <a:spcPts val="1015"/>
+                <a:spcPts val="1073"/>
               </a:lnSpc>
             </a:pPr>
             <a:r>
-              <a:rPr sz="700" b="1">
+              <a:rPr sz="740" b="1">
                 <a:solidFill>
                   <a:srgbClr val="1B2230"/>
                 </a:solidFill>
@@ -3876,14 +3905,14 @@
       </p:sp>
       <p:sp>
         <p:nvSpPr>
-          <p:cNvPr id="5" name="텍스트"/>
+          <p:cNvPr id="6" name="텍스트"/>
           <p:cNvSpPr txBox="1"/>
           <p:nvPr/>
         </p:nvSpPr>
         <p:spPr>
           <a:xfrm>
             <a:off x="1656000" y="388800"/>
-            <a:ext cx="576000" cy="324000"/>
+            <a:ext cx="576000" cy="129600"/>
           </a:xfrm>
           <a:prstGeom prst="rect">
             <a:avLst/>
@@ -3898,11 +3927,11 @@
           <a:p>
             <a:pPr algn="l">
               <a:lnSpc>
-                <a:spcPts val="2610"/>
+                <a:spcPts val="927"/>
               </a:lnSpc>
             </a:pPr>
             <a:r>
-              <a:rPr sz="1800" b="1">
+              <a:rPr sz="640" b="1" spc="120">
                 <a:solidFill>
                   <a:srgbClr val="C75574"/>
                 </a:solidFill>
@@ -3916,13 +3945,42 @@
       </p:sp>
       <p:sp>
         <p:nvSpPr>
-          <p:cNvPr id="6" name="텍스트"/>
+          <p:cNvPr id="7" name="Rectangle 6"/>
+          <p:cNvSpPr/>
+          <p:nvPr/>
+        </p:nvSpPr>
+        <p:spPr>
+          <a:xfrm>
+            <a:off x="1656000" y="554400"/>
+            <a:ext cx="144000" cy="14400"/>
+          </a:xfrm>
+          <a:prstGeom prst="rect">
+            <a:avLst/>
+          </a:prstGeom>
+          <a:solidFill>
+            <a:srgbClr val="C75574"/>
+          </a:solidFill>
+          <a:ln>
+            <a:noFill/>
+          </a:ln>
+        </p:spPr>
+        <p:txBody>
+          <a:bodyPr rtlCol="0" anchor="ctr"/>
+          <a:lstStyle/>
+          <a:p>
+            <a:pPr algn="ctr"/>
+          </a:p>
+        </p:txBody>
+      </p:sp>
+      <p:sp>
+        <p:nvSpPr>
+          <p:cNvPr id="8" name="텍스트"/>
           <p:cNvSpPr txBox="1"/>
           <p:nvPr/>
         </p:nvSpPr>
         <p:spPr>
           <a:xfrm>
-            <a:off x="1656000" y="712800"/>
+            <a:off x="1656000" y="626400"/>
             <a:ext cx="1296000" cy="180000"/>
           </a:xfrm>
           <a:prstGeom prst="rect">
@@ -3938,11 +3996,11 @@
           <a:p>
             <a:pPr algn="l">
               <a:lnSpc>
-                <a:spcPts val="1015"/>
+                <a:spcPts val="1073"/>
               </a:lnSpc>
             </a:pPr>
             <a:r>
-              <a:rPr sz="700" b="1">
+              <a:rPr sz="740" b="1">
                 <a:solidFill>
                   <a:srgbClr val="1B2230"/>
                 </a:solidFill>
@@ -3956,14 +4014,14 @@
       </p:sp>
       <p:sp>
         <p:nvSpPr>
-          <p:cNvPr id="7" name="텍스트"/>
+          <p:cNvPr id="9" name="텍스트"/>
           <p:cNvSpPr txBox="1"/>
           <p:nvPr/>
         </p:nvSpPr>
         <p:spPr>
           <a:xfrm>
             <a:off x="252000" y="928800"/>
-            <a:ext cx="576000" cy="324000"/>
+            <a:ext cx="576000" cy="129600"/>
           </a:xfrm>
           <a:prstGeom prst="rect">
             <a:avLst/>
@@ -3978,11 +4036,11 @@
           <a:p>
             <a:pPr algn="l">
               <a:lnSpc>
-                <a:spcPts val="2610"/>
+                <a:spcPts val="927"/>
               </a:lnSpc>
             </a:pPr>
             <a:r>
-              <a:rPr sz="1800" b="1">
+              <a:rPr sz="640" b="1" spc="120">
                 <a:solidFill>
                   <a:srgbClr val="C75574"/>
                 </a:solidFill>
@@ -3996,13 +4054,42 @@
       </p:sp>
       <p:sp>
         <p:nvSpPr>
-          <p:cNvPr id="8" name="텍스트"/>
+          <p:cNvPr id="10" name="Rectangle 9"/>
+          <p:cNvSpPr/>
+          <p:nvPr/>
+        </p:nvSpPr>
+        <p:spPr>
+          <a:xfrm>
+            <a:off x="252000" y="1094400"/>
+            <a:ext cx="144000" cy="14400"/>
+          </a:xfrm>
+          <a:prstGeom prst="rect">
+            <a:avLst/>
+          </a:prstGeom>
+          <a:solidFill>
+            <a:srgbClr val="C75574"/>
+          </a:solidFill>
+          <a:ln>
+            <a:noFill/>
+          </a:ln>
+        </p:spPr>
+        <p:txBody>
+          <a:bodyPr rtlCol="0" anchor="ctr"/>
+          <a:lstStyle/>
+          <a:p>
+            <a:pPr algn="ctr"/>
+          </a:p>
+        </p:txBody>
+      </p:sp>
+      <p:sp>
+        <p:nvSpPr>
+          <p:cNvPr id="11" name="텍스트"/>
           <p:cNvSpPr txBox="1"/>
           <p:nvPr/>
         </p:nvSpPr>
         <p:spPr>
           <a:xfrm>
-            <a:off x="252000" y="1252800"/>
+            <a:off x="252000" y="1166400"/>
             <a:ext cx="1296000" cy="180000"/>
           </a:xfrm>
           <a:prstGeom prst="rect">
@@ -4018,11 +4105,11 @@
           <a:p>
             <a:pPr algn="l">
               <a:lnSpc>
-                <a:spcPts val="1015"/>
+                <a:spcPts val="1073"/>
               </a:lnSpc>
             </a:pPr>
             <a:r>
-              <a:rPr sz="700" b="1">
+              <a:rPr sz="740" b="1">
                 <a:solidFill>
                   <a:srgbClr val="1B2230"/>
                 </a:solidFill>
@@ -4036,14 +4123,14 @@
       </p:sp>
       <p:sp>
         <p:nvSpPr>
-          <p:cNvPr id="9" name="텍스트"/>
+          <p:cNvPr id="12" name="텍스트"/>
           <p:cNvSpPr txBox="1"/>
           <p:nvPr/>
         </p:nvSpPr>
         <p:spPr>
           <a:xfrm>
             <a:off x="1656000" y="928800"/>
-            <a:ext cx="576000" cy="324000"/>
+            <a:ext cx="576000" cy="129600"/>
           </a:xfrm>
           <a:prstGeom prst="rect">
             <a:avLst/>
@@ -4058,11 +4145,11 @@
           <a:p>
             <a:pPr algn="l">
               <a:lnSpc>
-                <a:spcPts val="2610"/>
+                <a:spcPts val="927"/>
               </a:lnSpc>
             </a:pPr>
             <a:r>
-              <a:rPr sz="1800" b="1">
+              <a:rPr sz="640" b="1" spc="120">
                 <a:solidFill>
                   <a:srgbClr val="516667"/>
                 </a:solidFill>
@@ -4076,13 +4163,42 @@
       </p:sp>
       <p:sp>
         <p:nvSpPr>
-          <p:cNvPr id="10" name="텍스트"/>
+          <p:cNvPr id="13" name="Rectangle 12"/>
+          <p:cNvSpPr/>
+          <p:nvPr/>
+        </p:nvSpPr>
+        <p:spPr>
+          <a:xfrm>
+            <a:off x="1656000" y="1094400"/>
+            <a:ext cx="144000" cy="14400"/>
+          </a:xfrm>
+          <a:prstGeom prst="rect">
+            <a:avLst/>
+          </a:prstGeom>
+          <a:solidFill>
+            <a:srgbClr val="516667"/>
+          </a:solidFill>
+          <a:ln>
+            <a:noFill/>
+          </a:ln>
+        </p:spPr>
+        <p:txBody>
+          <a:bodyPr rtlCol="0" anchor="ctr"/>
+          <a:lstStyle/>
+          <a:p>
+            <a:pPr algn="ctr"/>
+          </a:p>
+        </p:txBody>
+      </p:sp>
+      <p:sp>
+        <p:nvSpPr>
+          <p:cNvPr id="14" name="텍스트"/>
           <p:cNvSpPr txBox="1"/>
           <p:nvPr/>
         </p:nvSpPr>
         <p:spPr>
           <a:xfrm>
-            <a:off x="1656000" y="1252800"/>
+            <a:off x="1656000" y="1166400"/>
             <a:ext cx="1296000" cy="180000"/>
           </a:xfrm>
           <a:prstGeom prst="rect">
@@ -4098,11 +4214,11 @@
           <a:p>
             <a:pPr algn="l">
               <a:lnSpc>
-                <a:spcPts val="1015"/>
+                <a:spcPts val="1073"/>
               </a:lnSpc>
             </a:pPr>
             <a:r>
-              <a:rPr sz="700" b="1">
+              <a:rPr sz="740" b="1">
                 <a:solidFill>
                   <a:srgbClr val="1B2230"/>
                 </a:solidFill>
@@ -4116,7 +4232,7 @@
       </p:sp>
       <p:sp>
         <p:nvSpPr>
-          <p:cNvPr id="11" name="텍스트"/>
+          <p:cNvPr id="15" name="텍스트"/>
           <p:cNvSpPr txBox="1"/>
           <p:nvPr/>
         </p:nvSpPr>
